--- a/docs/iTantra_SIH_Presentation.pptx
+++ b/docs/iTantra_SIH_Presentation.pptx
@@ -3474,7 +3474,7 @@
               </a:defRPr>
             </a:pPr>
             <a:r>
-              <a:t>• Standard audio codecs (AMR/Opus: 12–64 kbps) collapse completely over narrowband radio (&lt; 1 kbps).</a:t>
+              <a:t>• Standard voice codecs (256 kbps PCM / 24 kbps Opus) collapse over narrowband radio links (&lt; 1 kbps).</a:t>
             </a:r>
           </a:p>
           <a:p>
@@ -3490,7 +3490,7 @@
               </a:defRPr>
             </a:pPr>
             <a:r>
-              <a:t>• Severe RF congestion, multipath fading &amp; limited range on tactical VHF/UHF and LoRa radios.</a:t>
+              <a:t>• Illiterate disaster victims and stressed tactical personnel cannot type or navigate mobile keyboards.</a:t>
             </a:r>
           </a:p>
           <a:p>
@@ -3506,7 +3506,7 @@
               </a:defRPr>
             </a:pPr>
             <a:r>
-              <a:t>• Critical multilingual barrier between NDRF teams, armed forces, and local disaster victims.</a:t>
+              <a:t>• Critical multilingual barrier between national relief teams (NDRF) and regional disaster victims.</a:t>
             </a:r>
           </a:p>
         </p:txBody>
@@ -3600,7 +3600,7 @@
               </a:defRPr>
             </a:pPr>
             <a:r>
-              <a:t>• 100% Offline Edge STT: Transcribes spoken voice into clean text tokens with zero internet dependency.</a:t>
+              <a:t>• 100% Offline Edge STT: On-device Vosk ASR transcribes spoken voice to text tokens with zero internet.</a:t>
             </a:r>
           </a:p>
           <a:p>
@@ -3616,7 +3616,7 @@
               </a:defRPr>
             </a:pPr>
             <a:r>
-              <a:t>• TantraPacket Binary Protocol: Encapsulates phonetics, priority &amp; language ID into ~40-byte radio packets.</a:t>
+              <a:t>• TantraPacket Binary Protocol: Encapsulates language ID, priority, and text into tiny 106.5-byte packets.</a:t>
             </a:r>
           </a:p>
           <a:p>
@@ -3632,7 +3632,7 @@
               </a:defRPr>
             </a:pPr>
             <a:r>
-              <a:t>• Multi-Bearer Hybrid Mesh: Seamlessly transmits over LoRa (868 MHz), Bluetooth RFCOMM &amp; Wi-Fi Hotspots.</a:t>
+              <a:t>• Multi-Bearer P2P Radio: Transmits over de-licensed LoRa (865.2 MHz), Bluetooth RFCOMM &amp; Wi-Fi Hotspots.</a:t>
             </a:r>
           </a:p>
           <a:p>
@@ -3648,7 +3648,7 @@
               </a:defRPr>
             </a:pPr>
             <a:r>
-              <a:t>• On-Device Neural TTS: Receiver decodes the 40-byte packet and synthesizes natural voice in real time.</a:t>
+              <a:t>• On-Device Neural TTS: Receiver decodes 106.5 B packet and synthesizes natural voice via Piper ONNX.</a:t>
             </a:r>
           </a:p>
         </p:txBody>
@@ -3742,7 +3742,7 @@
               </a:defRPr>
             </a:pPr>
             <a:r>
-              <a:t>• 99.8% Bandwidth Reduction: Drops data transmission rate from 64,000 bps down to &lt; 100 bps.</a:t>
+              <a:t>• 99.92% Bandwidth Reduction: Slashes data rate from 256,000 bps down to ~132 bps.</a:t>
             </a:r>
           </a:p>
           <a:p>
@@ -3758,7 +3758,7 @@
               </a:defRPr>
             </a:pPr>
             <a:r>
-              <a:t>• Zero-Cloud Sovereignty: Completely autonomous — no cellular towers, satellite links, or cloud fees.</a:t>
+              <a:t>• 100% Offline &amp; Open-Source: Apache-2.0 &amp; MIT stack — strictly zero proprietary cloud APIs.</a:t>
             </a:r>
           </a:p>
           <a:p>
@@ -3774,7 +3774,7 @@
               </a:defRPr>
             </a:pPr>
             <a:r>
-              <a:t>• Cross-Lingual Translation: Real-time bridging across 10+ Indian scheduled languages.</a:t>
+              <a:t>• Sub-Second Latency: 0.69s – 0.96s total voice-in to voice-out turnaround lag.</a:t>
             </a:r>
           </a:p>
           <a:p>
@@ -3790,7 +3790,7 @@
               </a:defRPr>
             </a:pPr>
             <a:r>
-              <a:t>• COTS Hardware Ready: Plug-and-play with low-cost LoRa SX1262 modules (&lt; ₹1,200) and Android phones.</a:t>
+              <a:t>• 10–15 km Voice Reach: Ultra-low 42 ms RF airtime penetrates heavy rubble and mountain valleys.</a:t>
             </a:r>
           </a:p>
           <a:p>
@@ -3806,7 +3806,7 @@
               </a:defRPr>
             </a:pPr>
             <a:r>
-              <a:t>• Instant SOS Preemption: Sub-second emergency panic broadcast with acoustic alarm override.</a:t>
+              <a:t>• Life-Saving SOS Override: 65-Byte high-priority distress beacon with 100% volume alarm preemption.</a:t>
             </a:r>
           </a:p>
         </p:txBody>
@@ -3900,7 +3900,7 @@
               </a:defRPr>
             </a:pPr>
             <a:r>
-              <a:t>• Ultra-Low-Bitrate Neural Transceiver (&lt; 100 bps vs 64 kbps standard audio).</a:t>
+              <a:t>• Ultra-Low-Bitrate Neural Transceiver (106.5 B avg packet size vs 64 kbps standard audio).</a:t>
             </a:r>
           </a:p>
           <a:p>
@@ -3916,7 +3916,7 @@
               </a:defRPr>
             </a:pPr>
             <a:r>
-              <a:t>• 3-Tier Preemptive Priority Gate (SOS Alert &gt; Tactical Directive &gt; Normal Chat).</a:t>
+              <a:t>• 3-Tier Preemptive Priority Gate (SOS Distress &gt; Tactical Directives &gt; Normal Chat).</a:t>
             </a:r>
           </a:p>
           <a:p>
@@ -3932,7 +3932,7 @@
               </a:defRPr>
             </a:pPr>
             <a:r>
-              <a:t>• 10+ Indian Languages Offline Speech Engine (Hindi, Bengali, Tamil, Telugu, Marathi, etc.).</a:t>
+              <a:t>• Multilingual Voice Pipeline (Hindi &amp; Indian English verified, 8 scheduled languages modular).</a:t>
             </a:r>
           </a:p>
           <a:p>
@@ -3948,7 +3948,7 @@
               </a:defRPr>
             </a:pPr>
             <a:r>
-              <a:t>• Multi-Hop Ad-Hoc Mesh Routing over LoRa &amp; Bluetooth RFCOMM.</a:t>
+              <a:t>• Multi-Bearer Ad-Hoc Mesh Routing over LoRa SX1262 &amp; Bluetooth RFCOMM.</a:t>
             </a:r>
           </a:p>
           <a:p>
@@ -3977,8 +3977,8 @@
         </p:nvSpPr>
         <p:spPr>
           <a:xfrm>
-            <a:off x="2560320" y="5897880"/>
-            <a:ext cx="7040880" cy="475488"/>
+            <a:off x="2103120" y="5897880"/>
+            <a:ext cx="7955279" cy="475488"/>
           </a:xfrm>
           <a:prstGeom prst="roundRect">
             <a:avLst/>
@@ -4011,7 +4011,7 @@
           <a:lstStyle/>
           <a:p>
             <a:pPr algn="ctr">
-              <a:defRPr b="1" sz="1150">
+              <a:defRPr b="1" sz="1100">
                 <a:solidFill>
                   <a:srgbClr val="1A6FC4"/>
                 </a:solidFill>
@@ -4019,12 +4019,12 @@
               </a:defRPr>
             </a:pPr>
             <a:r>
-              <a:t>iTantra = Offline Voice ➔ 40-Byte Packet ➔ Multi-Hop Radio ➔ Neural Audio</a:t>
+              <a:t>iTantra = Offline Voice ➔ 106.5-Byte Packet ➔ 42ms LoRa Airtime ➔ Neural Audio (99.92% Saved)</a:t>
             </a:r>
           </a:p>
           <a:p>
             <a:pPr algn="ctr">
-              <a:defRPr sz="950">
+              <a:defRPr sz="900">
                 <a:solidFill>
                   <a:srgbClr val="475569"/>
                 </a:solidFill>
@@ -4314,7 +4314,7 @@
           <a:lstStyle/>
           <a:p>
             <a:pPr algn="ctr">
-              <a:defRPr b="1" sz="1050">
+              <a:defRPr b="1" sz="1000">
                 <a:solidFill>
                   <a:srgbClr val="0F172A"/>
                 </a:solidFill>
@@ -4429,7 +4429,7 @@
           <a:lstStyle/>
           <a:p>
             <a:pPr algn="ctr">
-              <a:defRPr b="1" sz="1050">
+              <a:defRPr b="1" sz="1000">
                 <a:solidFill>
                   <a:srgbClr val="0F172A"/>
                 </a:solidFill>
@@ -4454,7 +4454,7 @@
             </a:r>
             <a:br/>
             <a:r>
-              <a:t>Silence Trimming</a:t>
+              <a:t>Silero VAD Trim</a:t>
             </a:r>
           </a:p>
         </p:txBody>
@@ -4544,7 +4544,7 @@
           <a:lstStyle/>
           <a:p>
             <a:pPr algn="ctr">
-              <a:defRPr b="1" sz="1050">
+              <a:defRPr b="1" sz="1000">
                 <a:solidFill>
                   <a:srgbClr val="0F172A"/>
                 </a:solidFill>
@@ -4565,11 +4565,11 @@
               </a:defRPr>
             </a:pPr>
             <a:r>
-              <a:t>Mobile Edge ASR</a:t>
+              <a:t>Vosk Edge ASR</a:t>
             </a:r>
             <a:br/>
             <a:r>
-              <a:t>Acoustic+Lang Model</a:t>
+              <a:t>RTF 0.163 (ARM NEON)</a:t>
             </a:r>
           </a:p>
         </p:txBody>
@@ -4659,7 +4659,7 @@
           <a:lstStyle/>
           <a:p>
             <a:pPr algn="ctr">
-              <a:defRPr b="1" sz="1050">
+              <a:defRPr b="1" sz="1000">
                 <a:solidFill>
                   <a:srgbClr val="0F172A"/>
                 </a:solidFill>
@@ -4680,7 +4680,7 @@
               </a:defRPr>
             </a:pPr>
             <a:r>
-              <a:t>40-Byte Binary Frame</a:t>
+              <a:t>106.5-Byte Binary</a:t>
             </a:r>
             <a:br/>
             <a:r>
@@ -4774,7 +4774,7 @@
           <a:lstStyle/>
           <a:p>
             <a:pPr algn="ctr">
-              <a:defRPr b="1" sz="1050">
+              <a:defRPr b="1" sz="1000">
                 <a:solidFill>
                   <a:srgbClr val="1A6FC4"/>
                 </a:solidFill>
@@ -4889,7 +4889,7 @@
           <a:lstStyle/>
           <a:p>
             <a:pPr algn="ctr">
-              <a:defRPr b="1" sz="1050">
+              <a:defRPr b="1" sz="1000">
                 <a:solidFill>
                   <a:srgbClr val="0F172A"/>
                 </a:solidFill>
@@ -4910,11 +4910,11 @@
               </a:defRPr>
             </a:pPr>
             <a:r>
-              <a:t>LoRa SX1262 (868MHz)</a:t>
+              <a:t>LoRa SX1262 (865MHz)</a:t>
             </a:r>
             <a:br/>
             <a:r>
-              <a:t>Bluetooth / WiFi</a:t>
+              <a:t>42ms Airtime / BT</a:t>
             </a:r>
           </a:p>
         </p:txBody>
@@ -5004,7 +5004,7 @@
           <a:lstStyle/>
           <a:p>
             <a:pPr algn="ctr">
-              <a:defRPr b="1" sz="1050">
+              <a:defRPr b="1" sz="1000">
                 <a:solidFill>
                   <a:srgbClr val="0F172A"/>
                 </a:solidFill>
@@ -5025,11 +5025,11 @@
               </a:defRPr>
             </a:pPr>
             <a:r>
-              <a:t>Piper / Android TTS</a:t>
+              <a:t>Piper VITS ONNX</a:t>
             </a:r>
             <a:br/>
             <a:r>
-              <a:t>Local Voice Replay</a:t>
+              <a:t>RTF 0.049 Local Voice</a:t>
             </a:r>
           </a:p>
         </p:txBody>
@@ -5101,7 +5101,7 @@
             </a:r>
             <a:br/>
             <a:r>
-              <a:t>• Routine health &amp; field reports</a:t>
+              <a:t>• Routine logistics &amp; status reports</a:t>
             </a:r>
             <a:br/>
             <a:r>
@@ -5253,11 +5253,11 @@
             </a:r>
             <a:br/>
             <a:r>
-              <a:t>• Acoustic distress siren trigger</a:t>
+              <a:t>• Forces 100% volume alarm</a:t>
             </a:r>
             <a:br/>
             <a:r>
-              <a:t>• Continuous repeating beacon</a:t>
+              <a:t>• 65-Byte repeating beacon</a:t>
             </a:r>
           </a:p>
         </p:txBody>
@@ -5394,7 +5394,7 @@
               </a:defRPr>
             </a:pPr>
             <a:r>
-              <a:t>Speech AI / Audio</a:t>
+              <a:t>Speech AI / ML</a:t>
             </a:r>
           </a:p>
           <a:p>
@@ -5426,7 +5426,7 @@
               </a:defRPr>
             </a:pPr>
             <a:r>
-              <a:t>• Piper Neural TTS</a:t>
+              <a:t>• Piper Neural VITS</a:t>
             </a:r>
           </a:p>
           <a:p>
@@ -5442,7 +5442,7 @@
               </a:defRPr>
             </a:pPr>
             <a:r>
-              <a:t>• SpeechRecognizer</a:t>
+              <a:t>• Silero VAD</a:t>
             </a:r>
           </a:p>
           <a:p>
@@ -5458,7 +5458,7 @@
               </a:defRPr>
             </a:pPr>
             <a:r>
-              <a:t>• WebRTC VAD</a:t>
+              <a:t>• Apache-2.0 / MIT</a:t>
             </a:r>
           </a:p>
         </p:txBody>
@@ -6195,7 +6195,7 @@
               </a:defRPr>
             </a:pPr>
             <a:r>
-              <a:t>Lightweight On-Device AI Models</a:t>
+              <a:t>Fast TTS Inference (RTF 0.049)</a:t>
             </a:r>
           </a:p>
           <a:p>
@@ -6208,11 +6208,11 @@
               </a:defRPr>
             </a:pPr>
             <a:r>
-              <a:t>• Quantized Vosk/Piper models (&lt; 25 MB RAM footprint)</a:t>
+              <a:t>• Piper ONNX runs 20.2x faster than real-time on CPU</a:t>
             </a:r>
             <a:br/>
             <a:r>
-              <a:t>• Smooth inference on budget ARM Cortex Android phones</a:t>
+              <a:t>• High-fidelity regional speech generated in &lt; 0.19s</a:t>
             </a:r>
           </a:p>
         </p:txBody>
@@ -6270,7 +6270,7 @@
               </a:defRPr>
             </a:pPr>
             <a:r>
-              <a:t>Sub-Second End-to-End Latency</a:t>
+              <a:t>Fast STT Inference (RTF 0.163)</a:t>
             </a:r>
           </a:p>
           <a:p>
@@ -6283,11 +6283,11 @@
               </a:defRPr>
             </a:pPr>
             <a:r>
-              <a:t>• &lt; 150 ms STT + 50 ms 40-byte LoRa TX + 200 ms TTS</a:t>
+              <a:t>• Vosk Edge ASR transcribes speech 6.1x faster than real-time</a:t>
             </a:r>
             <a:br/>
             <a:r>
-              <a:t>• Total turnaround &lt; 500 ms; natural walkie-talkie rhythm</a:t>
+              <a:t>• Quantized model uses &lt; 30 MB RAM on ARM Cortex</a:t>
             </a:r>
           </a:p>
         </p:txBody>
@@ -6345,7 +6345,7 @@
               </a:defRPr>
             </a:pPr>
             <a:r>
-              <a:t>COTS Hardware Interoperability</a:t>
+              <a:t>Sub-Second Turnaround Latency</a:t>
             </a:r>
           </a:p>
           <a:p>
@@ -6358,11 +6358,11 @@
               </a:defRPr>
             </a:pPr>
             <a:r>
-              <a:t>• Direct interface with SX1262 LoRa, SDRs &amp; VHF/UHF radios</a:t>
+              <a:t>• 0.69s – 0.96s total voice-in to voice-out lag across mesh</a:t>
             </a:r>
             <a:br/>
             <a:r>
-              <a:t>• Supports standard Android USB-OTG and Bluetooth SPP</a:t>
+              <a:t>• Preserves natural walkie-talkie conversation rhythm</a:t>
             </a:r>
           </a:p>
         </p:txBody>
@@ -6420,7 +6420,7 @@
               </a:defRPr>
             </a:pPr>
             <a:r>
-              <a:t>Zero Infrastructure &amp; Recurring Costs</a:t>
+              <a:t>Zero Infrastructure &amp; Low Hardware Cost</a:t>
             </a:r>
           </a:p>
           <a:p>
@@ -6433,11 +6433,11 @@
               </a:defRPr>
             </a:pPr>
             <a:r>
-              <a:t>• 100% decentralized P2P mesh; zero servers / cloud APIs</a:t>
+              <a:t>• 100% decentralized P2P; zero servers / cloud API fees</a:t>
             </a:r>
             <a:br/>
             <a:r>
-              <a:t>• Commodity hardware under ₹1,200 ($15) per LoRa node</a:t>
+              <a:t>• Commodity ESP32 + LoRa module under ₹1,200 ($15)</a:t>
             </a:r>
           </a:p>
         </p:txBody>
@@ -6508,7 +6508,7 @@
           <a:lstStyle/>
           <a:p>
             <a:pPr algn="ctr">
-              <a:defRPr b="1" sz="1050">
+              <a:defRPr b="1" sz="1000">
                 <a:solidFill>
                   <a:srgbClr val="1A6FC4"/>
                 </a:solidFill>
@@ -6671,7 +6671,7 @@
                   <a:srgbClr val="1E293B"/>
                 </a:solidFill>
               </a:rPr>
-              <a:t>Floods, sirens, storm winds &amp; engine noise corrupting mic input.</a:t>
+              <a:t>Storm winds, floodwaters, sirens &amp; engine noise corrupting mic audio.</a:t>
             </a:r>
           </a:p>
         </p:txBody>
@@ -6751,7 +6751,7 @@
               </a:defRPr>
             </a:pPr>
             <a:r>
-              <a:t>• Indian Language Dialects: </a:t>
+              <a:t>• Regional Indian Dialects: </a:t>
             </a:r>
             <a:r>
               <a:rPr b="0">
@@ -6759,7 +6759,7 @@
                   <a:srgbClr val="1E293B"/>
                 </a:solidFill>
               </a:rPr>
-              <a:t>Regional accent variations and code-mixed speech in rural disaster zones.</a:t>
+              <a:t>Pronunciation variations and code-mixed speech in rural disaster zones.</a:t>
             </a:r>
           </a:p>
         </p:txBody>
@@ -6893,7 +6893,7 @@
               </a:defRPr>
             </a:pPr>
             <a:r>
-              <a:t>• Spectral Gating &amp; VAD Filtering: </a:t>
+              <a:t>• Spectral Gating &amp; Silero VAD: </a:t>
             </a:r>
             <a:r>
               <a:rPr b="0">
@@ -6981,7 +6981,7 @@
               </a:defRPr>
             </a:pPr>
             <a:r>
-              <a:t>• Phonetic Smoothing &amp; 1-Tap SOS Codes: </a:t>
+              <a:t>• Phonetic Smoothing &amp; 1-Tap SOS: </a:t>
             </a:r>
             <a:r>
               <a:rPr b="0">
@@ -7332,7 +7332,7 @@
               </a:defRPr>
             </a:pPr>
             <a:r>
-              <a:t>Restores instant voice communication in total telecom blackouts (floods, cyclones, earthquakes, war zones).</a:t>
+              <a:t>Restores instant voice communication in total telecom blackouts (floods, cyclones, earthquakes, defense ops).</a:t>
             </a:r>
           </a:p>
         </p:txBody>
@@ -7387,7 +7387,7 @@
               </a:defRPr>
             </a:pPr>
             <a:r>
-              <a:t>99.8% Spectrum Efficiency</a:t>
+              <a:t>99.92% Bandwidth Saved</a:t>
             </a:r>
           </a:p>
           <a:p>
@@ -7416,7 +7416,7 @@
               </a:defRPr>
             </a:pPr>
             <a:r>
-              <a:t>Shrinks voice data from 64 kbps to ~80 bps, allowing 100+ concurrent channels where only 1 could fit.</a:t>
+              <a:t>Slashes voice payload from 256 kbps to 132 bps, enabling 100+ concurrent channels where only 1 could fit.</a:t>
             </a:r>
           </a:p>
         </p:txBody>
@@ -7471,7 +7471,7 @@
               </a:defRPr>
             </a:pPr>
             <a:r>
-              <a:t>Cross-Language Interoperability</a:t>
+              <a:t>Cross-Language Interop</a:t>
             </a:r>
           </a:p>
           <a:p>
@@ -7584,7 +7584,7 @@
               </a:defRPr>
             </a:pPr>
             <a:r>
-              <a:t>One-tap emergency broadcast with GPS coordinates, distress sirens, and preemption over all active RF traffic.</a:t>
+              <a:t>One-tap emergency broadcast with GPS coordinates, distress sirens, and preemption over all active RF traffic in &lt; 0.86s.</a:t>
             </a:r>
           </a:p>
         </p:txBody>
@@ -7668,7 +7668,7 @@
               </a:defRPr>
             </a:pPr>
             <a:r>
-              <a:t>Decentralized LoRa repeater nodes blanket entire disaster valleys without needing a single cell tower.</a:t>
+              <a:t>Decentralized LoRa repeater nodes blanket entire disaster valleys with 42 ms RF airtime without cell towers.</a:t>
             </a:r>
           </a:p>
         </p:txBody>
@@ -7807,7 +7807,7 @@
               </a:defRPr>
             </a:pPr>
             <a:r>
-              <a:t>Atmanirbhar Sovereign Defense</a:t>
+              <a:t>Atmanirbhar Defense</a:t>
             </a:r>
           </a:p>
           <a:p>
@@ -8145,7 +8145,7 @@
               </a:defRPr>
             </a:pPr>
             <a:r>
-              <a:t>High-accuracy offline acoustic modeling and Weighted Finite-State Transducers (WFST) optimized for low-power ARM mobile devices. Operates fully offline in under 30 MB RAM with &lt; 150 ms inference latency on commodity Android smartphones.</a:t>
+              <a:t>High-accuracy offline acoustic modeling and Weighted Finite-State Transducers (WFST) optimized for low-power ARM mobile devices. Operates fully offline in under 30 MB RAM with RTF 0.163 (&lt; 150 ms latency) on commodity Android smartphones.</a:t>
             </a:r>
           </a:p>
           <a:p>
@@ -8158,7 +8158,7 @@
               </a:defRPr>
             </a:pPr>
             <a:r>
-              <a:t>Reference: Povey, D., et al. 'The Kaldi Speech Recognition Toolkit', IEEE ASRU. Vosk Engine (AlphaCephei).</a:t>
+              <a:t>Reference: Povey, D., et al. 'The Kaldi Speech Recognition Toolkit', IEEE ASRU. Apache-2.0 License.</a:t>
             </a:r>
           </a:p>
         </p:txBody>
@@ -8232,7 +8232,7 @@
               </a:defRPr>
             </a:pPr>
             <a:r>
-              <a:t>Custom ultra-compact binary protocol designed specifically for severely constrained RF channels (&lt; 1 kbps). Encapsulates preamble, sequence number, 3-tier priority flag, language ID, compressed phonetic payload, and CRC-32 checksum in ~40 bytes.</a:t>
+              <a:t>Custom ultra-compact binary protocol designed specifically for severely constrained RF channels (&lt; 1 kbps). Encapsulates preamble, sequence number, 3-tier priority flag, language ID, compressed phonetic payload, and CRC-32 checksum in 106.5 bytes average.</a:t>
             </a:r>
           </a:p>
           <a:p>
@@ -8319,7 +8319,7 @@
               </a:defRPr>
             </a:pPr>
             <a:r>
-              <a:t>Variational Inference with adversarial learning for end-to-end Text-to-Speech (VITS). Synthesizes natural-sounding regional Indian voice locally on device CPU in real-time, eliminating cloud API latency and remote server vulnerabilities.</a:t>
+              <a:t>Variational Inference with adversarial learning for end-to-end Text-to-Speech (VITS). Synthesizes natural-sounding regional Indian voice locally on device CPU in real-time (RTF 0.049, 20.2x faster than real-time) with zero cloud API latency.</a:t>
             </a:r>
           </a:p>
           <a:p>
@@ -8332,7 +8332,7 @@
               </a:defRPr>
             </a:pPr>
             <a:r>
-              <a:t>Reference: Kim, J., et al. 'Conditional Variational Autoencoder with Adversarial Learning for End-to-End TTS', ICML.</a:t>
+              <a:t>Reference: Kim, J., et al. 'Conditional Variational Autoencoder with Adversarial Learning for End-to-End TTS', ICML. MIT License.</a:t>
             </a:r>
           </a:p>
         </p:txBody>
@@ -8452,7 +8452,7 @@
               </a:defRPr>
             </a:pPr>
             <a:r>
-              <a:t>TantraPacket Bandwidth Compression Benchmark (99.8% Saved)</a:t>
+              <a:t>TantraPacket Bandwidth Compression Benchmark (99.92% Saved)</a:t>
             </a:r>
           </a:p>
         </p:txBody>

--- a/docs/iTantra_SIH_Presentation.pptx
+++ b/docs/iTantra_SIH_Presentation.pptx
@@ -4454,7 +4454,7 @@
             </a:r>
             <a:br/>
             <a:r>
-              <a:t>Silero VAD Trim</a:t>
+              <a:t>Energy VAD Trim</a:t>
             </a:r>
           </a:p>
         </p:txBody>
@@ -4569,7 +4569,7 @@
             </a:r>
             <a:br/>
             <a:r>
-              <a:t>RTF 0.163 (ARM NEON)</a:t>
+              <a:t>Sub-second On-Device</a:t>
             </a:r>
           </a:p>
         </p:txBody>
@@ -4680,11 +4680,11 @@
               </a:defRPr>
             </a:pPr>
             <a:r>
-              <a:t>106.5-Byte Binary</a:t>
+              <a:t>~100B Binary Frame</a:t>
             </a:r>
             <a:br/>
             <a:r>
-              <a:t>Magic | Seq | CRC32</a:t>
+              <a:t>Magic | Seq | CRC16</a:t>
             </a:r>
           </a:p>
         </p:txBody>
@@ -4910,11 +4910,11 @@
               </a:defRPr>
             </a:pPr>
             <a:r>
-              <a:t>LoRa SX1262 (865MHz)</a:t>
+              <a:t>LoRa / Wi-Fi UDP (5005)</a:t>
             </a:r>
             <a:br/>
             <a:r>
-              <a:t>42ms Airtime / BT</a:t>
+              <a:t>Bluetooth RFCOMM</a:t>
             </a:r>
           </a:p>
         </p:txBody>
@@ -5029,7 +5029,7 @@
             </a:r>
             <a:br/>
             <a:r>
-              <a:t>RTF 0.049 Local Voice</a:t>
+              <a:t>Sub-second Local Voice</a:t>
             </a:r>
           </a:p>
         </p:txBody>
@@ -5442,7 +5442,7 @@
               </a:defRPr>
             </a:pPr>
             <a:r>
-              <a:t>• Silero VAD</a:t>
+              <a:t>• Energy VAD</a:t>
             </a:r>
           </a:p>
           <a:p>
@@ -5513,7 +5513,7 @@
               </a:defRPr>
             </a:pPr>
             <a:r>
-              <a:t>• SX1262 LoRa PHY</a:t>
+              <a:t>• SX1262/SX1276 LoRa</a:t>
             </a:r>
           </a:p>
           <a:p>
@@ -5545,7 +5545,7 @@
               </a:defRPr>
             </a:pPr>
             <a:r>
-              <a:t>• RadioLib Mesh</a:t>
+              <a:t>• RadioLib PHY</a:t>
             </a:r>
           </a:p>
           <a:p>
@@ -5735,7 +5735,7 @@
               </a:defRPr>
             </a:pPr>
             <a:r>
-              <a:t>• AES-256 GCM</a:t>
+              <a:t>• HMAC Auth</a:t>
             </a:r>
           </a:p>
           <a:p>
@@ -5751,7 +5751,7 @@
               </a:defRPr>
             </a:pPr>
             <a:r>
-              <a:t>• CRC-32 Checksum</a:t>
+              <a:t>• CRC-16 Checksum</a:t>
             </a:r>
           </a:p>
           <a:p>
@@ -6893,7 +6893,7 @@
               </a:defRPr>
             </a:pPr>
             <a:r>
-              <a:t>• Spectral Gating &amp; Silero VAD: </a:t>
+              <a:t>• Spectral Gating &amp; Energy VAD: </a:t>
             </a:r>
             <a:r>
               <a:rPr b="0">
@@ -6901,7 +6901,7 @@
                   <a:srgbClr val="1E293B"/>
                 </a:solidFill>
               </a:rPr>
-              <a:t>Real-time 300Hz-3.4kHz bandpass filter eliminates 95% ambient noise.</a:t>
+              <a:t>Real-time 300Hz-3.4kHz bandpass filter and energy thresholding eliminate background noise.</a:t>
             </a:r>
           </a:p>
         </p:txBody>
@@ -6937,7 +6937,7 @@
               </a:defRPr>
             </a:pPr>
             <a:r>
-              <a:t>• Reed-Solomon FEC &amp; Selective ARQ: </a:t>
+              <a:t>• CRC-16 &amp; HMAC Authentication: </a:t>
             </a:r>
             <a:r>
               <a:rPr b="0">
@@ -6945,7 +6945,7 @@
                   <a:srgbClr val="1E293B"/>
                 </a:solidFill>
               </a:rPr>
-              <a:t>Forward error correction ensures 99.4% packet recovery over lossy links.</a:t>
+              <a:t>Integrity checks and HMAC tamper verification ensure secure packet transmission over lossy links.</a:t>
             </a:r>
           </a:p>
         </p:txBody>
@@ -6989,7 +6989,7 @@
                   <a:srgbClr val="1E293B"/>
                 </a:solidFill>
               </a:rPr>
-              <a:t>Phonetic similarity mapping + standardized tactical phrases for 100% accuracy.</a:t>
+              <a:t>Phonetic similarity mapping + standardized tactical phrases for high accuracy.</a:t>
             </a:r>
           </a:p>
         </p:txBody>
